--- a/presentation/Presentacion_Biblioteca_Viva.pptx
+++ b/presentation/Presentacion_Biblioteca_Viva.pptx
@@ -29,9 +29,10 @@
     <p:sldId id="277" r:id="rId23"/>
     <p:sldId id="278" r:id="rId24"/>
     <p:sldId id="279" r:id="rId25"/>
+    <p:sldId id="280" r:id="rId26"/>
   </p:sldIdLst>
   <p:notesMasterIdLst>
-    <p:notesMasterId r:id="rId26"/>
+    <p:notesMasterId r:id="rId27"/>
   </p:notesMasterIdLst>
   <p:sldSz cx="12191695" cy="6858000"/>
   <p:notesSz cx="6858000" cy="12191695"/>
@@ -1957,6 +1958,94 @@
             <a:fld id="{F7021451-1387-4CA6-816F-3879F97B5CBC}" type="slidenum">
               <a:rPr lang="en-US"/>
               <a:t>24</a:t>
+            </a:fld>
+            <a:endParaRPr lang="en-US"/>
+          </a:p>
+        </p:txBody>
+      </p:sp>
+    </p:spTree>
+    <p:extLst>
+      <p:ext uri="{BB962C8B-B14F-4D97-AF65-F5344CB8AC3E}">
+        <p14:creationId xmlns:p14="http://schemas.microsoft.com/office/powerpoint/2010/main" val="1024086991"/>
+      </p:ext>
+    </p:extLst>
+  </p:cSld>
+  <p:clrMapOvr>
+    <a:masterClrMapping/>
+  </p:clrMapOvr>
+</p:notes>
+</file>
+
+<file path=ppt/notesSlides/notesSlide25.xml><?xml version="1.0" encoding="utf-8"?>
+<p:notes xmlns:a="http://schemas.openxmlformats.org/drawingml/2006/main" xmlns:r="http://schemas.openxmlformats.org/officeDocument/2006/relationships" xmlns:p="http://schemas.openxmlformats.org/presentationml/2006/main">
+  <p:cSld>
+    <p:spTree>
+      <p:nvGrpSpPr>
+        <p:cNvPr id="1" name=""/>
+        <p:cNvGrpSpPr/>
+        <p:nvPr/>
+      </p:nvGrpSpPr>
+      <p:grpSpPr>
+        <a:xfrm>
+          <a:off x="0" y="0"/>
+          <a:ext cx="0" cy="0"/>
+          <a:chOff x="0" y="0"/>
+          <a:chExt cx="0" cy="0"/>
+        </a:xfrm>
+      </p:grpSpPr>
+      <p:sp>
+        <p:nvSpPr>
+          <p:cNvPr id="2" name="Slide Image Placeholder 1"/>
+          <p:cNvSpPr>
+            <a:spLocks noGrp="1" noRot="1" noChangeAspect="1"/>
+          </p:cNvSpPr>
+          <p:nvPr>
+            <p:ph type="sldImg"/>
+          </p:nvPr>
+        </p:nvSpPr>
+        <p:spPr/>
+      </p:sp>
+      <p:sp>
+        <p:nvSpPr>
+          <p:cNvPr id="3" name="Notes Placeholder 2"/>
+          <p:cNvSpPr>
+            <a:spLocks noGrp="1"/>
+          </p:cNvSpPr>
+          <p:nvPr>
+            <p:ph type="body" idx="1"/>
+          </p:nvPr>
+        </p:nvSpPr>
+        <p:spPr/>
+        <p:txBody>
+          <a:bodyPr/>
+          <a:lstStyle/>
+          <a:p>
+            <a:r>
+              <a:rPr lang="en-US" dirty="0"/>
+              <a:t/>
+            </a:r>
+            <a:endParaRPr lang="en-US" dirty="0"/>
+          </a:p>
+        </p:txBody>
+      </p:sp>
+      <p:sp>
+        <p:nvSpPr>
+          <p:cNvPr id="4" name="Slide Number Placeholder 3"/>
+          <p:cNvSpPr>
+            <a:spLocks noGrp="1"/>
+          </p:cNvSpPr>
+          <p:nvPr>
+            <p:ph type="sldNum" sz="quarter" idx="10"/>
+          </p:nvPr>
+        </p:nvSpPr>
+        <p:spPr/>
+        <p:txBody>
+          <a:bodyPr/>
+          <a:lstStyle/>
+          <a:p>
+            <a:fld id="{F7021451-1387-4CA6-816F-3879F97B5CBC}" type="slidenum">
+              <a:rPr lang="en-US"/>
+              <a:t>25</a:t>
             </a:fld>
             <a:endParaRPr lang="en-US"/>
           </a:p>
@@ -9139,7 +9228,7 @@
                 <a:ea typeface="Calibri" pitchFamily="34" charset="-122"/>
                 <a:cs typeface="Calibri" pitchFamily="34" charset="-120"/>
               </a:rPr>
-              <a:t>El trabajo futuro, y lo que este proceso deja como aporte generalizable.</a:t>
+              <a:t>La diferenciación que sostiene el proyecto, el trabajo futuro y lo que deja como aporte generalizable.</a:t>
             </a:r>
             <a:endParaRPr lang="en-US" sz="1600" dirty="0"/>
           </a:p>
@@ -9308,7 +9397,7 @@
                 <a:ea typeface="Calibri" pitchFamily="34" charset="-122"/>
                 <a:cs typeface="Calibri" pitchFamily="34" charset="-120"/>
               </a:rPr>
-              <a:t>QUÉ SIGUE</a:t>
+              <a:t>DIFERENCIACIÓN</a:t>
             </a:r>
             <a:endParaRPr lang="en-US" sz="1300" dirty="0"/>
           </a:p>
@@ -9347,7 +9436,7 @@
                 <a:ea typeface="Cambria" pitchFamily="34" charset="-122"/>
                 <a:cs typeface="Cambria" pitchFamily="34" charset="-120"/>
               </a:rPr>
-              <a:t>Trabajo futuro</a:t>
+              <a:t>No es un buscador de papers</a:t>
             </a:r>
             <a:endParaRPr lang="en-US" sz="3000" dirty="0"/>
           </a:p>
@@ -9385,7 +9474,49 @@
         <p:spPr>
           <a:xfrm>
             <a:off x="822960" y="2194560"/>
-            <a:ext cx="10545775" cy="2926080"/>
+            <a:ext cx="10545775" cy="914400"/>
+          </a:xfrm>
+          <a:prstGeom prst="rect">
+            <a:avLst/>
+          </a:prstGeom>
+          <a:noFill/>
+          <a:ln/>
+        </p:spPr>
+        <p:txBody>
+          <a:bodyPr wrap="square" lIns="0" tIns="0" rIns="0" bIns="0" rtlCol="0" anchor="t"/>
+          <a:lstStyle/>
+          <a:p>
+            <a:pPr algn="l" indent="0" marL="0">
+              <a:lnSpc>
+                <a:spcPct val="118000"/>
+              </a:lnSpc>
+              <a:buNone/>
+            </a:pPr>
+            <a:r>
+              <a:rPr lang="en-US" sz="1650" dirty="0">
+                <a:solidFill>
+                  <a:srgbClr val="24301F"/>
+                </a:solidFill>
+                <a:latin typeface="Calibri" pitchFamily="34" charset="0"/>
+                <a:ea typeface="Calibri" pitchFamily="34" charset="-122"/>
+                <a:cs typeface="Calibri" pitchFamily="34" charset="-120"/>
+              </a:rPr>
+              <a:t>Las herramientas de descubrimiento (Elicit y similares) ayudan a encontrar y extraer literatura. Biblioteca Viva apunta a algo distinto y más duradero: mantener honesta tu pregunta de investigación a lo largo del tiempo.</a:t>
+            </a:r>
+            <a:endParaRPr lang="en-US" sz="1650" dirty="0"/>
+          </a:p>
+        </p:txBody>
+      </p:sp>
+      <p:sp>
+        <p:nvSpPr>
+          <p:cNvPr id="7" name="Text 5"/>
+          <p:cNvSpPr/>
+          <p:nvPr/>
+        </p:nvSpPr>
+        <p:spPr>
+          <a:xfrm>
+            <a:off x="822960" y="3291840"/>
+            <a:ext cx="10545775" cy="1920240"/>
           </a:xfrm>
           <a:prstGeom prst="rect">
             <a:avLst/>
@@ -9408,7 +9539,7 @@
               <a:buChar char="•"/>
             </a:pPr>
             <a:r>
-              <a:rPr lang="en-US" sz="1600" dirty="0">
+              <a:rPr lang="en-US" sz="1550" dirty="0">
                 <a:solidFill>
                   <a:srgbClr val="24301F"/>
                 </a:solidFill>
@@ -9416,9 +9547,9 @@
                 <a:ea typeface="Calibri" pitchFamily="34" charset="-122"/>
                 <a:cs typeface="Calibri" pitchFamily="34" charset="-120"/>
               </a:rPr>
-              <a:t>Extracción estructurada de variables experimentales cuantitativas (solvente, método, rendimiento), la meta central del semestre.</a:t>
-            </a:r>
-            <a:endParaRPr lang="en-US" sz="1600" dirty="0"/>
+              <a:t>Reexaminar la validez de la pregunta a medida que se acumula la literatura y a medida que llegan tus propios resultados.</a:t>
+            </a:r>
+            <a:endParaRPr lang="en-US" sz="1550" dirty="0"/>
           </a:p>
           <a:p>
             <a:pPr algn="l" marL="342900" indent="-342900">
@@ -9432,7 +9563,7 @@
               <a:buChar char="•"/>
             </a:pPr>
             <a:r>
-              <a:rPr lang="en-US" sz="1600" dirty="0">
+              <a:rPr lang="en-US" sz="1550" dirty="0">
                 <a:solidFill>
                   <a:srgbClr val="24301F"/>
                 </a:solidFill>
@@ -9440,33 +9571,9 @@
                 <a:ea typeface="Calibri" pitchFamily="34" charset="-122"/>
                 <a:cs typeface="Calibri" pitchFamily="34" charset="-120"/>
               </a:rPr>
-              <a:t>Colaboración institucional con el Sistema de Bibliotecas UPR para acceso legítimo a bases pagadas.</a:t>
-            </a:r>
-            <a:endParaRPr lang="en-US" sz="1600" dirty="0"/>
-          </a:p>
-          <a:p>
-            <a:pPr algn="l" marL="342900" indent="-342900">
-              <a:lnSpc>
-                <a:spcPct val="114000"/>
-              </a:lnSpc>
-              <a:spcAft>
-                <a:spcPts val="1200"/>
-              </a:spcAft>
-              <a:buSzPct val="100000"/>
-              <a:buChar char="•"/>
-            </a:pPr>
-            <a:r>
-              <a:rPr lang="en-US" sz="1600" dirty="0">
-                <a:solidFill>
-                  <a:srgbClr val="24301F"/>
-                </a:solidFill>
-                <a:latin typeface="Calibri" pitchFamily="34" charset="0"/>
-                <a:ea typeface="Calibri" pitchFamily="34" charset="-122"/>
-                <a:cs typeface="Calibri" pitchFamily="34" charset="-120"/>
-              </a:rPr>
-              <a:t>Salidas de publicación más completas: tabla comparativa y borradores citados por sección, en estilos de cita estándar.</a:t>
-            </a:r>
-            <a:endParaRPr lang="en-US" sz="1600" dirty="0"/>
+              <a:t>Más allá de encontrar fuentes: señalar posibles huecos teóricos, metodológicos y éticos que dificulten publicar. Fin último, un trabajo sólido y defendible.</a:t>
+            </a:r>
+            <a:endParaRPr lang="en-US" sz="1550" dirty="0"/>
           </a:p>
           <a:p>
             <a:pPr algn="l" marL="342900" indent="-342900">
@@ -9477,7 +9584,7 @@
               <a:buChar char="•"/>
             </a:pPr>
             <a:r>
-              <a:rPr lang="en-US" sz="1600" dirty="0">
+              <a:rPr lang="en-US" sz="1550" dirty="0">
                 <a:solidFill>
                   <a:srgbClr val="24301F"/>
                 </a:solidFill>
@@ -9485,15 +9592,15 @@
                 <a:ea typeface="Calibri" pitchFamily="34" charset="-122"/>
                 <a:cs typeface="Calibri" pitchFamily="34" charset="-120"/>
               </a:rPr>
-              <a:t>Escalar la herramienta a otras disciplinas más allá del caso de química.</a:t>
-            </a:r>
-            <a:endParaRPr lang="en-US" sz="1600" dirty="0"/>
-          </a:p>
-        </p:txBody>
-      </p:sp>
-      <p:sp>
-        <p:nvSpPr>
-          <p:cNvPr id="7" name="Shape 5"/>
+              <a:t>Cada señal anclada a evidencia real o a una ausencia declarada, nunca inventada; lo ético como preguntas a considerar, no veredictos.</a:t>
+            </a:r>
+            <a:endParaRPr lang="en-US" sz="1550" dirty="0"/>
+          </a:p>
+        </p:txBody>
+      </p:sp>
+      <p:sp>
+        <p:nvSpPr>
+          <p:cNvPr id="8" name="Shape 6"/>
           <p:cNvSpPr/>
           <p:nvPr/>
         </p:nvSpPr>
@@ -9515,7 +9622,7 @@
       </p:sp>
       <p:sp>
         <p:nvSpPr>
-          <p:cNvPr id="8" name="Text 6"/>
+          <p:cNvPr id="9" name="Text 7"/>
           <p:cNvSpPr/>
           <p:nvPr/>
         </p:nvSpPr>
@@ -9566,7 +9673,7 @@
                 <a:ea typeface="Calibri" pitchFamily="34" charset="-122"/>
                 <a:cs typeface="Calibri" pitchFamily="34" charset="-120"/>
               </a:rPr>
-              <a:t>Definir la sede o revista de la publicación metodológica sobre desarrollo de apps de IA para la investigación, y ajustar el enfoque de esta ponencia a esa audiencia.</a:t>
+              <a:t>El insumo de "tus propios resultados" y la auditoría de defendibilidad por dimensiones son la dirección en construcción; hoy existen sus semillas en la síntesis y el reenfoque.</a:t>
             </a:r>
             <a:endParaRPr lang="en-US" sz="1350" dirty="0"/>
           </a:p>
@@ -9574,7 +9681,7 @@
       </p:sp>
       <p:sp>
         <p:nvSpPr>
-          <p:cNvPr id="9" name="Text 7"/>
+          <p:cNvPr id="10" name="Text 8"/>
           <p:cNvSpPr/>
           <p:nvPr/>
         </p:nvSpPr>
@@ -9613,7 +9720,7 @@
       </p:sp>
       <p:sp>
         <p:nvSpPr>
-          <p:cNvPr id="10" name="Text 8"/>
+          <p:cNvPr id="11" name="Text 9"/>
           <p:cNvSpPr/>
           <p:nvPr/>
         </p:nvSpPr>
@@ -9735,7 +9842,7 @@
                 <a:ea typeface="Calibri" pitchFamily="34" charset="-122"/>
                 <a:cs typeface="Calibri" pitchFamily="34" charset="-120"/>
               </a:rPr>
-              <a:t>APORTE GENERALIZABLE</a:t>
+              <a:t>QUÉ SIGUE</a:t>
             </a:r>
             <a:endParaRPr lang="en-US" sz="1300" dirty="0"/>
           </a:p>
@@ -9774,7 +9881,7 @@
                 <a:ea typeface="Cambria" pitchFamily="34" charset="-122"/>
                 <a:cs typeface="Cambria" pitchFamily="34" charset="-120"/>
               </a:rPr>
-              <a:t>Lecciones para apps de IA en investigación</a:t>
+              <a:t>Trabajo futuro</a:t>
             </a:r>
             <a:endParaRPr lang="en-US" sz="3000" dirty="0"/>
           </a:p>
@@ -9812,49 +9919,7 @@
         <p:spPr>
           <a:xfrm>
             <a:off x="822960" y="2194560"/>
-            <a:ext cx="10545775" cy="868680"/>
-          </a:xfrm>
-          <a:prstGeom prst="rect">
-            <a:avLst/>
-          </a:prstGeom>
-          <a:noFill/>
-          <a:ln/>
-        </p:spPr>
-        <p:txBody>
-          <a:bodyPr wrap="square" lIns="0" tIns="0" rIns="0" bIns="0" rtlCol="0" anchor="t"/>
-          <a:lstStyle/>
-          <a:p>
-            <a:pPr algn="l" indent="0" marL="0">
-              <a:lnSpc>
-                <a:spcPct val="118000"/>
-              </a:lnSpc>
-              <a:buNone/>
-            </a:pPr>
-            <a:r>
-              <a:rPr lang="en-US" sz="1650" dirty="0">
-                <a:solidFill>
-                  <a:srgbClr val="24301F"/>
-                </a:solidFill>
-                <a:latin typeface="Calibri" pitchFamily="34" charset="0"/>
-                <a:ea typeface="Calibri" pitchFamily="34" charset="-122"/>
-                <a:cs typeface="Calibri" pitchFamily="34" charset="-120"/>
-              </a:rPr>
-              <a:t>Más allá del caso, el proceso deja principios que podrían guiar otras herramientas de IA para la investigación científica.</a:t>
-            </a:r>
-            <a:endParaRPr lang="en-US" sz="1650" dirty="0"/>
-          </a:p>
-        </p:txBody>
-      </p:sp>
-      <p:sp>
-        <p:nvSpPr>
-          <p:cNvPr id="7" name="Text 5"/>
-          <p:cNvSpPr/>
-          <p:nvPr/>
-        </p:nvSpPr>
-        <p:spPr>
-          <a:xfrm>
-            <a:off x="822960" y="3246120"/>
-            <a:ext cx="10545775" cy="3749040"/>
+            <a:ext cx="10545775" cy="2926080"/>
           </a:xfrm>
           <a:prstGeom prst="rect">
             <a:avLst/>
@@ -9885,7 +9950,7 @@
                 <a:ea typeface="Calibri" pitchFamily="34" charset="-122"/>
                 <a:cs typeface="Calibri" pitchFamily="34" charset="-120"/>
               </a:rPr>
-              <a:t>Anclaje obligatorio: la IA comenta evidencia real, no la genera; esto se diseña, no se asume.</a:t>
+              <a:t>Extracción estructurada de variables experimentales cuantitativas (solvente, método, rendimiento), la meta central del semestre.</a:t>
             </a:r>
             <a:endParaRPr lang="en-US" sz="1600" dirty="0"/>
           </a:p>
@@ -9909,7 +9974,7 @@
                 <a:ea typeface="Calibri" pitchFamily="34" charset="-122"/>
                 <a:cs typeface="Calibri" pitchFamily="34" charset="-120"/>
               </a:rPr>
-              <a:t>Humano en el centro: la herramienta propone borradores auditables, el investigador decide.</a:t>
+              <a:t>Colaboración institucional con el Sistema de Bibliotecas UPR para acceso legítimo a bases pagadas.</a:t>
             </a:r>
             <a:endParaRPr lang="en-US" sz="1600" dirty="0"/>
           </a:p>
@@ -9933,7 +9998,7 @@
                 <a:ea typeface="Calibri" pitchFamily="34" charset="-122"/>
                 <a:cs typeface="Calibri" pitchFamily="34" charset="-120"/>
               </a:rPr>
-              <a:t>Validar con uso real: la prueba decisiva no es que el código pase, sino que a alguien le sirva sin guía.</a:t>
+              <a:t>Salidas de publicación más completas: tabla comparativa y borradores citados por sección, en estilos de cita estándar.</a:t>
             </a:r>
             <a:endParaRPr lang="en-US" sz="1600" dirty="0"/>
           </a:p>
@@ -9954,7 +10019,7 @@
                 <a:ea typeface="Calibri" pitchFamily="34" charset="-122"/>
                 <a:cs typeface="Calibri" pitchFamily="34" charset="-120"/>
               </a:rPr>
-              <a:t>Documentar el proceso mientras ocurre: el registro del desarrollo es en sí mismo un resultado publicable.</a:t>
+              <a:t>Escalar la herramienta a otras disciplinas más allá del caso de química.</a:t>
             </a:r>
             <a:endParaRPr lang="en-US" sz="1600" dirty="0"/>
           </a:p>
@@ -9962,7 +10027,88 @@
       </p:sp>
       <p:sp>
         <p:nvSpPr>
+          <p:cNvPr id="7" name="Shape 5"/>
+          <p:cNvSpPr/>
+          <p:nvPr/>
+        </p:nvSpPr>
+        <p:spPr>
+          <a:xfrm>
+            <a:off x="822960" y="5394960"/>
+            <a:ext cx="10545775" cy="914400"/>
+          </a:xfrm>
+          <a:prstGeom prst="roundRect">
+            <a:avLst>
+              <a:gd name="adj" fmla="val 6000"/>
+            </a:avLst>
+          </a:prstGeom>
+          <a:solidFill>
+            <a:srgbClr val="F0E4D3"/>
+          </a:solidFill>
+          <a:ln/>
+        </p:spPr>
+      </p:sp>
+      <p:sp>
+        <p:nvSpPr>
           <p:cNvPr id="8" name="Text 6"/>
+          <p:cNvSpPr/>
+          <p:nvPr/>
+        </p:nvSpPr>
+        <p:spPr>
+          <a:xfrm>
+            <a:off x="1051560" y="5394960"/>
+            <a:ext cx="10088575" cy="914400"/>
+          </a:xfrm>
+          <a:prstGeom prst="rect">
+            <a:avLst/>
+          </a:prstGeom>
+          <a:noFill/>
+          <a:ln/>
+        </p:spPr>
+        <p:txBody>
+          <a:bodyPr wrap="square" lIns="0" tIns="0" rIns="0" bIns="0" rtlCol="0" anchor="ctr"/>
+          <a:lstStyle/>
+          <a:p>
+            <a:pPr algn="l" indent="0" marL="0">
+              <a:lnSpc>
+                <a:spcPct val="112000"/>
+              </a:lnSpc>
+              <a:buNone/>
+            </a:pPr>
+            <a:r>
+              <a:rPr lang="en-US" sz="1350" b="1" dirty="0">
+                <a:solidFill>
+                  <a:srgbClr val="8A5A2B"/>
+                </a:solidFill>
+                <a:latin typeface="Calibri" pitchFamily="34" charset="0"/>
+                <a:ea typeface="Calibri" pitchFamily="34" charset="-122"/>
+                <a:cs typeface="Calibri" pitchFamily="34" charset="-120"/>
+              </a:rPr>
+              <a:t>PENDIENTE   </a:t>
+            </a:r>
+            <a:pPr algn="l" indent="0" marL="0">
+              <a:lnSpc>
+                <a:spcPct val="112000"/>
+              </a:lnSpc>
+              <a:buNone/>
+            </a:pPr>
+            <a:r>
+              <a:rPr lang="en-US" sz="1350" dirty="0">
+                <a:solidFill>
+                  <a:srgbClr val="5A4326"/>
+                </a:solidFill>
+                <a:latin typeface="Calibri" pitchFamily="34" charset="0"/>
+                <a:ea typeface="Calibri" pitchFamily="34" charset="-122"/>
+                <a:cs typeface="Calibri" pitchFamily="34" charset="-120"/>
+              </a:rPr>
+              <a:t>Definir la sede o revista de la publicación metodológica sobre desarrollo de apps de IA para la investigación, y ajustar el enfoque de esta ponencia a esa audiencia.</a:t>
+            </a:r>
+            <a:endParaRPr lang="en-US" sz="1350" dirty="0"/>
+          </a:p>
+        </p:txBody>
+      </p:sp>
+      <p:sp>
+        <p:nvSpPr>
+          <p:cNvPr id="9" name="Text 7"/>
           <p:cNvSpPr/>
           <p:nvPr/>
         </p:nvSpPr>
@@ -10001,7 +10147,7 @@
       </p:sp>
       <p:sp>
         <p:nvSpPr>
-          <p:cNvPr id="9" name="Text 7"/>
+          <p:cNvPr id="10" name="Text 8"/>
           <p:cNvSpPr/>
           <p:nvPr/>
         </p:nvSpPr>
@@ -10049,6 +10195,394 @@
 <file path=ppt/slides/slide24.xml><?xml version="1.0" encoding="utf-8"?>
 <p:sld xmlns:a="http://schemas.openxmlformats.org/drawingml/2006/main" xmlns:r="http://schemas.openxmlformats.org/officeDocument/2006/relationships" xmlns:p="http://schemas.openxmlformats.org/presentationml/2006/main">
   <p:cSld name="Slide 24">
+    <p:bg>
+      <p:bgPr>
+        <a:solidFill>
+          <a:srgbClr val="FBFAF6"/>
+        </a:solidFill>
+      </p:bgPr>
+    </p:bg>
+    <p:spTree>
+      <p:nvGrpSpPr>
+        <p:cNvPr id="1" name=""/>
+        <p:cNvGrpSpPr/>
+        <p:nvPr/>
+      </p:nvGrpSpPr>
+      <p:grpSpPr>
+        <a:xfrm>
+          <a:off x="0" y="0"/>
+          <a:ext cx="0" cy="0"/>
+          <a:chOff x="0" y="0"/>
+          <a:chExt cx="0" cy="0"/>
+        </a:xfrm>
+      </p:grpSpPr>
+      <p:sp>
+        <p:nvSpPr>
+          <p:cNvPr id="2" name="Shape 0"/>
+          <p:cNvSpPr/>
+          <p:nvPr/>
+        </p:nvSpPr>
+        <p:spPr>
+          <a:xfrm>
+            <a:off x="0" y="0"/>
+            <a:ext cx="237744" cy="6858000"/>
+          </a:xfrm>
+          <a:prstGeom prst="rect">
+            <a:avLst/>
+          </a:prstGeom>
+          <a:solidFill>
+            <a:srgbClr val="5B8C3E"/>
+          </a:solidFill>
+          <a:ln/>
+        </p:spPr>
+      </p:sp>
+      <p:sp>
+        <p:nvSpPr>
+          <p:cNvPr id="3" name="Text 1"/>
+          <p:cNvSpPr/>
+          <p:nvPr/>
+        </p:nvSpPr>
+        <p:spPr>
+          <a:xfrm>
+            <a:off x="822960" y="457200"/>
+            <a:ext cx="10545775" cy="365760"/>
+          </a:xfrm>
+          <a:prstGeom prst="rect">
+            <a:avLst/>
+          </a:prstGeom>
+          <a:noFill/>
+          <a:ln/>
+        </p:spPr>
+        <p:txBody>
+          <a:bodyPr wrap="square" lIns="0" tIns="0" rIns="0" bIns="0" rtlCol="0" anchor="ctr"/>
+          <a:lstStyle/>
+          <a:p>
+            <a:pPr algn="l" indent="0" marL="0">
+              <a:buNone/>
+            </a:pPr>
+            <a:r>
+              <a:rPr lang="en-US" sz="1300" b="1" spc="200" kern="0" dirty="0">
+                <a:solidFill>
+                  <a:srgbClr val="5B8C3E"/>
+                </a:solidFill>
+                <a:latin typeface="Calibri" pitchFamily="34" charset="0"/>
+                <a:ea typeface="Calibri" pitchFamily="34" charset="-122"/>
+                <a:cs typeface="Calibri" pitchFamily="34" charset="-120"/>
+              </a:rPr>
+              <a:t>APORTE GENERALIZABLE</a:t>
+            </a:r>
+            <a:endParaRPr lang="en-US" sz="1300" dirty="0"/>
+          </a:p>
+        </p:txBody>
+      </p:sp>
+      <p:sp>
+        <p:nvSpPr>
+          <p:cNvPr id="4" name="Text 2"/>
+          <p:cNvSpPr/>
+          <p:nvPr/>
+        </p:nvSpPr>
+        <p:spPr>
+          <a:xfrm>
+            <a:off x="822960" y="822960"/>
+            <a:ext cx="10545775" cy="960120"/>
+          </a:xfrm>
+          <a:prstGeom prst="rect">
+            <a:avLst/>
+          </a:prstGeom>
+          <a:noFill/>
+          <a:ln/>
+        </p:spPr>
+        <p:txBody>
+          <a:bodyPr wrap="square" lIns="0" tIns="0" rIns="0" bIns="0" rtlCol="0" anchor="ctr"/>
+          <a:lstStyle/>
+          <a:p>
+            <a:pPr algn="l" indent="0" marL="0">
+              <a:buNone/>
+            </a:pPr>
+            <a:r>
+              <a:rPr lang="en-US" sz="3000" b="1" dirty="0">
+                <a:solidFill>
+                  <a:srgbClr val="1F4620"/>
+                </a:solidFill>
+                <a:latin typeface="Cambria" pitchFamily="34" charset="0"/>
+                <a:ea typeface="Cambria" pitchFamily="34" charset="-122"/>
+                <a:cs typeface="Cambria" pitchFamily="34" charset="-120"/>
+              </a:rPr>
+              <a:t>Lecciones para apps de IA en investigación</a:t>
+            </a:r>
+            <a:endParaRPr lang="en-US" sz="3000" dirty="0"/>
+          </a:p>
+        </p:txBody>
+      </p:sp>
+      <p:sp>
+        <p:nvSpPr>
+          <p:cNvPr id="5" name="Shape 3"/>
+          <p:cNvSpPr/>
+          <p:nvPr/>
+        </p:nvSpPr>
+        <p:spPr>
+          <a:xfrm>
+            <a:off x="822960" y="1847088"/>
+            <a:ext cx="10545775" cy="0"/>
+          </a:xfrm>
+          <a:prstGeom prst="line">
+            <a:avLst/>
+          </a:prstGeom>
+          <a:noFill/>
+          <a:ln w="19050">
+            <a:solidFill>
+              <a:srgbClr val="BFD9A8"/>
+            </a:solidFill>
+            <a:prstDash val="solid"/>
+          </a:ln>
+        </p:spPr>
+      </p:sp>
+      <p:sp>
+        <p:nvSpPr>
+          <p:cNvPr id="6" name="Text 4"/>
+          <p:cNvSpPr/>
+          <p:nvPr/>
+        </p:nvSpPr>
+        <p:spPr>
+          <a:xfrm>
+            <a:off x="822960" y="2194560"/>
+            <a:ext cx="10545775" cy="868680"/>
+          </a:xfrm>
+          <a:prstGeom prst="rect">
+            <a:avLst/>
+          </a:prstGeom>
+          <a:noFill/>
+          <a:ln/>
+        </p:spPr>
+        <p:txBody>
+          <a:bodyPr wrap="square" lIns="0" tIns="0" rIns="0" bIns="0" rtlCol="0" anchor="t"/>
+          <a:lstStyle/>
+          <a:p>
+            <a:pPr algn="l" indent="0" marL="0">
+              <a:lnSpc>
+                <a:spcPct val="118000"/>
+              </a:lnSpc>
+              <a:buNone/>
+            </a:pPr>
+            <a:r>
+              <a:rPr lang="en-US" sz="1650" dirty="0">
+                <a:solidFill>
+                  <a:srgbClr val="24301F"/>
+                </a:solidFill>
+                <a:latin typeface="Calibri" pitchFamily="34" charset="0"/>
+                <a:ea typeface="Calibri" pitchFamily="34" charset="-122"/>
+                <a:cs typeface="Calibri" pitchFamily="34" charset="-120"/>
+              </a:rPr>
+              <a:t>Más allá del caso, el proceso deja principios que podrían guiar otras herramientas de IA para la investigación científica.</a:t>
+            </a:r>
+            <a:endParaRPr lang="en-US" sz="1650" dirty="0"/>
+          </a:p>
+        </p:txBody>
+      </p:sp>
+      <p:sp>
+        <p:nvSpPr>
+          <p:cNvPr id="7" name="Text 5"/>
+          <p:cNvSpPr/>
+          <p:nvPr/>
+        </p:nvSpPr>
+        <p:spPr>
+          <a:xfrm>
+            <a:off x="822960" y="3246120"/>
+            <a:ext cx="10545775" cy="3749040"/>
+          </a:xfrm>
+          <a:prstGeom prst="rect">
+            <a:avLst/>
+          </a:prstGeom>
+          <a:noFill/>
+          <a:ln/>
+        </p:spPr>
+        <p:txBody>
+          <a:bodyPr wrap="square" lIns="0" tIns="0" rIns="0" bIns="0" rtlCol="0" anchor="t"/>
+          <a:lstStyle/>
+          <a:p>
+            <a:pPr algn="l" marL="342900" indent="-342900">
+              <a:lnSpc>
+                <a:spcPct val="114000"/>
+              </a:lnSpc>
+              <a:spcAft>
+                <a:spcPts val="1200"/>
+              </a:spcAft>
+              <a:buSzPct val="100000"/>
+              <a:buChar char="•"/>
+            </a:pPr>
+            <a:r>
+              <a:rPr lang="en-US" sz="1600" dirty="0">
+                <a:solidFill>
+                  <a:srgbClr val="24301F"/>
+                </a:solidFill>
+                <a:latin typeface="Calibri" pitchFamily="34" charset="0"/>
+                <a:ea typeface="Calibri" pitchFamily="34" charset="-122"/>
+                <a:cs typeface="Calibri" pitchFamily="34" charset="-120"/>
+              </a:rPr>
+              <a:t>Anclaje obligatorio: la IA comenta evidencia real, no la genera; esto se diseña, no se asume.</a:t>
+            </a:r>
+            <a:endParaRPr lang="en-US" sz="1600" dirty="0"/>
+          </a:p>
+          <a:p>
+            <a:pPr algn="l" marL="342900" indent="-342900">
+              <a:lnSpc>
+                <a:spcPct val="114000"/>
+              </a:lnSpc>
+              <a:spcAft>
+                <a:spcPts val="1200"/>
+              </a:spcAft>
+              <a:buSzPct val="100000"/>
+              <a:buChar char="•"/>
+            </a:pPr>
+            <a:r>
+              <a:rPr lang="en-US" sz="1600" dirty="0">
+                <a:solidFill>
+                  <a:srgbClr val="24301F"/>
+                </a:solidFill>
+                <a:latin typeface="Calibri" pitchFamily="34" charset="0"/>
+                <a:ea typeface="Calibri" pitchFamily="34" charset="-122"/>
+                <a:cs typeface="Calibri" pitchFamily="34" charset="-120"/>
+              </a:rPr>
+              <a:t>Humano en el centro: la herramienta propone borradores auditables, el investigador decide.</a:t>
+            </a:r>
+            <a:endParaRPr lang="en-US" sz="1600" dirty="0"/>
+          </a:p>
+          <a:p>
+            <a:pPr algn="l" marL="342900" indent="-342900">
+              <a:lnSpc>
+                <a:spcPct val="114000"/>
+              </a:lnSpc>
+              <a:spcAft>
+                <a:spcPts val="1200"/>
+              </a:spcAft>
+              <a:buSzPct val="100000"/>
+              <a:buChar char="•"/>
+            </a:pPr>
+            <a:r>
+              <a:rPr lang="en-US" sz="1600" dirty="0">
+                <a:solidFill>
+                  <a:srgbClr val="24301F"/>
+                </a:solidFill>
+                <a:latin typeface="Calibri" pitchFamily="34" charset="0"/>
+                <a:ea typeface="Calibri" pitchFamily="34" charset="-122"/>
+                <a:cs typeface="Calibri" pitchFamily="34" charset="-120"/>
+              </a:rPr>
+              <a:t>Validar con uso real: la prueba decisiva no es que el código pase, sino que a alguien le sirva sin guía.</a:t>
+            </a:r>
+            <a:endParaRPr lang="en-US" sz="1600" dirty="0"/>
+          </a:p>
+          <a:p>
+            <a:pPr algn="l" marL="342900" indent="-342900">
+              <a:lnSpc>
+                <a:spcPct val="114000"/>
+              </a:lnSpc>
+              <a:buSzPct val="100000"/>
+              <a:buChar char="•"/>
+            </a:pPr>
+            <a:r>
+              <a:rPr lang="en-US" sz="1600" dirty="0">
+                <a:solidFill>
+                  <a:srgbClr val="24301F"/>
+                </a:solidFill>
+                <a:latin typeface="Calibri" pitchFamily="34" charset="0"/>
+                <a:ea typeface="Calibri" pitchFamily="34" charset="-122"/>
+                <a:cs typeface="Calibri" pitchFamily="34" charset="-120"/>
+              </a:rPr>
+              <a:t>Documentar el proceso mientras ocurre: el registro del desarrollo es en sí mismo un resultado publicable.</a:t>
+            </a:r>
+            <a:endParaRPr lang="en-US" sz="1600" dirty="0"/>
+          </a:p>
+        </p:txBody>
+      </p:sp>
+      <p:sp>
+        <p:nvSpPr>
+          <p:cNvPr id="8" name="Text 6"/>
+          <p:cNvSpPr/>
+          <p:nvPr/>
+        </p:nvSpPr>
+        <p:spPr>
+          <a:xfrm>
+            <a:off x="822960" y="6400800"/>
+            <a:ext cx="7315200" cy="274320"/>
+          </a:xfrm>
+          <a:prstGeom prst="rect">
+            <a:avLst/>
+          </a:prstGeom>
+          <a:noFill/>
+          <a:ln/>
+        </p:spPr>
+        <p:txBody>
+          <a:bodyPr wrap="square" lIns="0" tIns="0" rIns="0" bIns="0" rtlCol="0" anchor="ctr"/>
+          <a:lstStyle/>
+          <a:p>
+            <a:pPr algn="l" indent="0" marL="0">
+              <a:buNone/>
+            </a:pPr>
+            <a:r>
+              <a:rPr lang="en-US" sz="900" dirty="0">
+                <a:solidFill>
+                  <a:srgbClr val="5B8C3E"/>
+                </a:solidFill>
+                <a:latin typeface="Calibri" pitchFamily="34" charset="0"/>
+                <a:ea typeface="Calibri" pitchFamily="34" charset="-122"/>
+                <a:cs typeface="Calibri" pitchFamily="34" charset="-120"/>
+              </a:rPr>
+              <a:t>Biblioteca Viva  ·  EugenIA Lab</a:t>
+            </a:r>
+            <a:endParaRPr lang="en-US" sz="900" dirty="0"/>
+          </a:p>
+        </p:txBody>
+      </p:sp>
+      <p:sp>
+        <p:nvSpPr>
+          <p:cNvPr id="9" name="Text 7"/>
+          <p:cNvSpPr/>
+          <p:nvPr/>
+        </p:nvSpPr>
+        <p:spPr>
+          <a:xfrm>
+            <a:off x="10911535" y="6400800"/>
+            <a:ext cx="457200" cy="274320"/>
+          </a:xfrm>
+          <a:prstGeom prst="rect">
+            <a:avLst/>
+          </a:prstGeom>
+          <a:noFill/>
+          <a:ln/>
+        </p:spPr>
+        <p:txBody>
+          <a:bodyPr wrap="square" lIns="0" tIns="0" rIns="0" bIns="0" rtlCol="0" anchor="ctr"/>
+          <a:lstStyle/>
+          <a:p>
+            <a:pPr algn="r" indent="0" marL="0">
+              <a:buNone/>
+            </a:pPr>
+            <a:r>
+              <a:rPr lang="en-US" sz="900" dirty="0">
+                <a:solidFill>
+                  <a:srgbClr val="5B8C3E"/>
+                </a:solidFill>
+                <a:latin typeface="Calibri" pitchFamily="34" charset="0"/>
+                <a:ea typeface="Calibri" pitchFamily="34" charset="-122"/>
+                <a:cs typeface="Calibri" pitchFamily="34" charset="-120"/>
+              </a:rPr>
+              <a:t>24</a:t>
+            </a:r>
+            <a:endParaRPr lang="en-US" sz="900" dirty="0"/>
+          </a:p>
+        </p:txBody>
+      </p:sp>
+    </p:spTree>
+  </p:cSld>
+  <p:clrMapOvr>
+    <a:masterClrMapping/>
+  </p:clrMapOvr>
+</p:sld>
+</file>
+
+<file path=ppt/slides/slide25.xml><?xml version="1.0" encoding="utf-8"?>
+<p:sld xmlns:a="http://schemas.openxmlformats.org/drawingml/2006/main" xmlns:r="http://schemas.openxmlformats.org/officeDocument/2006/relationships" xmlns:p="http://schemas.openxmlformats.org/presentationml/2006/main">
+  <p:cSld name="Slide 25">
     <p:bg>
       <p:bgPr>
         <a:solidFill>

--- a/presentation/Presentacion_Biblioteca_Viva.pptx
+++ b/presentation/Presentacion_Biblioteca_Viva.pptx
@@ -5548,7 +5548,7 @@
                 <a:ea typeface="Calibri" pitchFamily="34" charset="-122"/>
                 <a:cs typeface="Calibri" pitchFamily="34" charset="-120"/>
               </a:rPr>
-              <a:t>Fase C, en curso</a:t>
+              <a:t>Fase C, en producción</a:t>
             </a:r>
             <a:endParaRPr lang="en-US" sz="1450" dirty="0"/>
           </a:p>
@@ -5571,7 +5571,7 @@
                 <a:ea typeface="Calibri" pitchFamily="34" charset="-122"/>
                 <a:cs typeface="Calibri" pitchFamily="34" charset="-120"/>
               </a:rPr>
-              <a:t>Salidas orientadas a publicación: tabla comparativa y borradores citados de justificación, métodos y discusión.</a:t>
+              <a:t>Tabla comparativa, borradores citados por sección y estilos de cita (APA, ACS, Vancouver), desplegados el 18 de julio de 2026.</a:t>
             </a:r>
             <a:endParaRPr lang="en-US" sz="1450" dirty="0"/>
           </a:p>
@@ -5595,7 +5595,7 @@
                 <a:ea typeface="Calibri" pitchFamily="34" charset="-122"/>
                 <a:cs typeface="Calibri" pitchFamily="34" charset="-120"/>
               </a:rPr>
-              <a:t>Fase D, pendiente</a:t>
+              <a:t>Fase D, primera pasada hecha</a:t>
             </a:r>
             <a:endParaRPr lang="en-US" sz="1450" dirty="0"/>
           </a:p>
@@ -5615,7 +5615,7 @@
                 <a:ea typeface="Calibri" pitchFamily="34" charset="-122"/>
                 <a:cs typeface="Calibri" pitchFamily="34" charset="-120"/>
               </a:rPr>
-              <a:t>Pulido de lenguaje y consistencia en toda la app.</a:t>
+              <a:t>Corrección de lenguaje verificada; falta desplegarla y una relectura humana antes del congreso.</a:t>
             </a:r>
             <a:endParaRPr lang="en-US" sz="1450" dirty="0"/>
           </a:p>
@@ -5696,7 +5696,7 @@
                 <a:ea typeface="Calibri" pitchFamily="34" charset="-122"/>
                 <a:cs typeface="Calibri" pitchFamily="34" charset="-120"/>
               </a:rPr>
-              <a:t>Actualizar el estado de las fases C y D a medida que avancen; hoy la versión desplegada llega hasta el informe de evidencia inicial.</a:t>
+              <a:t>Estado al cierre de esta ronda (18 de julio de 2026): Fase C ya en producción, Fase D verificada y pendiente de desplegar antes del congreso.</a:t>
             </a:r>
             <a:endParaRPr lang="en-US" sz="1350" dirty="0"/>
           </a:p>
@@ -6776,7 +6776,7 @@
                 <a:ea typeface="Calibri" pitchFamily="34" charset="-122"/>
                 <a:cs typeface="Calibri" pitchFamily="34" charset="-120"/>
               </a:rPr>
-              <a:t>Falta la validación más importante: una prueba en frío con una estudiante usando la app sola, sin guía, para ver qué logra y dónde se pierde. Incluir aquí esos resultados cuando existan.</a:t>
+              <a:t>La prueba en frío con una estudiante, sin guía, no se completó a tiempo para esta presentación. Queda como la validación más importante, diferida al próximo ciclo.</a:t>
             </a:r>
             <a:endParaRPr lang="en-US" sz="1350" dirty="0"/>
           </a:p>
@@ -8065,7 +8065,7 @@
                           <a:ea typeface="Calibri" pitchFamily="34" charset="-122"/>
                           <a:cs typeface="Calibri" pitchFamily="34" charset="-120"/>
                         </a:rPr>
-                        <a:t>Prueba en frío con una estudiante, como validación pendiente y prioritaria</a:t>
+                        <a:t>Identificada como la validación más importante; no se completó a tiempo para esta presentación, queda diferida al próximo ciclo</a:t>
                       </a:r>
                       <a:endParaRPr lang="en-US" sz="1300" dirty="0">
                         <a:latin typeface="Calibri" charset="0"/>
@@ -9673,7 +9673,7 @@
                 <a:ea typeface="Calibri" pitchFamily="34" charset="-122"/>
                 <a:cs typeface="Calibri" pitchFamily="34" charset="-120"/>
               </a:rPr>
-              <a:t>El insumo de "tus propios resultados" y la auditoría de defendibilidad por dimensiones son la dirección en construcción; hoy existen sus semillas en la síntesis y el reenfoque.</a:t>
+              <a:t>El insumo de "tus propios resultados" y la auditoría de defendibilidad ya están construidos y verificados (18 de julio de 2026); falta aprobación visual y despliegue.</a:t>
             </a:r>
             <a:endParaRPr lang="en-US" sz="1350" dirty="0"/>
           </a:p>
@@ -10100,7 +10100,7 @@
                 <a:ea typeface="Calibri" pitchFamily="34" charset="-122"/>
                 <a:cs typeface="Calibri" pitchFamily="34" charset="-120"/>
               </a:rPr>
-              <a:t>Definir la sede o revista de la publicación metodológica sobre desarrollo de apps de IA para la investigación, y ajustar el enfoque de esta ponencia a esa audiencia.</a:t>
+              <a:t>La sede o revista de la publicación metodológica queda por definir; es trabajo posterior al congreso, no bloquea esta presentación.</a:t>
             </a:r>
             <a:endParaRPr lang="en-US" sz="1350" dirty="0"/>
           </a:p>
